--- a/Science_Complete_Course_SagarSir/04_Science_MahaManthan_मॉक_टेस्ट्स/Class_20_Grand_Biology_MahaManthan.pptx
+++ b/Science_Complete_Course_SagarSir/04_Science_MahaManthan_मॉक_टेस्ट्स/Class_20_Grand_Biology_MahaManthan.pptx
@@ -3599,7 +3599,7 @@
               </a:defRPr>
             </a:pPr>
             <a:r>
-              <a:t>मार्गदर्शक: सागर सर (NMMS King)  |  Helpline / WhatsApp: +91 91101 13671  |  Website: sagarcoaching.tech</a:t>
+              <a:t>मार्गदर्शक: सागर सर (NMMS King)  |  Website: sagarcoaching.tech</a:t>
             </a:r>
           </a:p>
         </p:txBody>
@@ -3771,7 +3771,7 @@
               </a:defRPr>
             </a:pPr>
             <a:r>
-              <a:t>WhatsApp / Helpline: +91 91101 13671  |  वेबसाइट: sagarcoaching.tech  |  Slide 10 of 63</a:t>
+              <a:t>वेबसाइट: sagarcoaching.tech  |  Slide 10 of 63</a:t>
             </a:r>
           </a:p>
         </p:txBody>
@@ -4289,7 +4289,7 @@
               </a:defRPr>
             </a:pPr>
             <a:r>
-              <a:t>WhatsApp / Helpline: +91 91101 13671  |  वेबसाइट: sagarcoaching.tech  |  Slide 11 of 63</a:t>
+              <a:t>वेबसाइट: sagarcoaching.tech  |  Slide 11 of 63</a:t>
             </a:r>
           </a:p>
         </p:txBody>
@@ -4736,7 +4736,7 @@
               </a:defRPr>
             </a:pPr>
             <a:r>
-              <a:t>WhatsApp / Helpline: +91 91101 13671  |  वेबसाइट: sagarcoaching.tech  |  Slide 12 of 63</a:t>
+              <a:t>वेबसाइट: sagarcoaching.tech  |  Slide 12 of 63</a:t>
             </a:r>
           </a:p>
         </p:txBody>
@@ -5254,7 +5254,7 @@
               </a:defRPr>
             </a:pPr>
             <a:r>
-              <a:t>WhatsApp / Helpline: +91 91101 13671  |  वेबसाइट: sagarcoaching.tech  |  Slide 13 of 63</a:t>
+              <a:t>वेबसाइट: sagarcoaching.tech  |  Slide 13 of 63</a:t>
             </a:r>
           </a:p>
         </p:txBody>
@@ -5701,7 +5701,7 @@
               </a:defRPr>
             </a:pPr>
             <a:r>
-              <a:t>WhatsApp / Helpline: +91 91101 13671  |  वेबसाइट: sagarcoaching.tech  |  Slide 14 of 63</a:t>
+              <a:t>वेबसाइट: sagarcoaching.tech  |  Slide 14 of 63</a:t>
             </a:r>
           </a:p>
         </p:txBody>
@@ -6219,7 +6219,7 @@
               </a:defRPr>
             </a:pPr>
             <a:r>
-              <a:t>WhatsApp / Helpline: +91 91101 13671  |  वेबसाइट: sagarcoaching.tech  |  Slide 15 of 63</a:t>
+              <a:t>वेबसाइट: sagarcoaching.tech  |  Slide 15 of 63</a:t>
             </a:r>
           </a:p>
         </p:txBody>
@@ -6666,7 +6666,7 @@
               </a:defRPr>
             </a:pPr>
             <a:r>
-              <a:t>WhatsApp / Helpline: +91 91101 13671  |  वेबसाइट: sagarcoaching.tech  |  Slide 16 of 63</a:t>
+              <a:t>वेबसाइट: sagarcoaching.tech  |  Slide 16 of 63</a:t>
             </a:r>
           </a:p>
         </p:txBody>
@@ -7184,7 +7184,7 @@
               </a:defRPr>
             </a:pPr>
             <a:r>
-              <a:t>WhatsApp / Helpline: +91 91101 13671  |  वेबसाइट: sagarcoaching.tech  |  Slide 17 of 63</a:t>
+              <a:t>वेबसाइट: sagarcoaching.tech  |  Slide 17 of 63</a:t>
             </a:r>
           </a:p>
         </p:txBody>
@@ -7631,7 +7631,7 @@
               </a:defRPr>
             </a:pPr>
             <a:r>
-              <a:t>WhatsApp / Helpline: +91 91101 13671  |  वेबसाइट: sagarcoaching.tech  |  Slide 18 of 63</a:t>
+              <a:t>वेबसाइट: sagarcoaching.tech  |  Slide 18 of 63</a:t>
             </a:r>
           </a:p>
         </p:txBody>
@@ -8149,7 +8149,7 @@
               </a:defRPr>
             </a:pPr>
             <a:r>
-              <a:t>WhatsApp / Helpline: +91 91101 13671  |  वेबसाइट: sagarcoaching.tech  |  Slide 19 of 63</a:t>
+              <a:t>वेबसाइट: sagarcoaching.tech  |  Slide 19 of 63</a:t>
             </a:r>
           </a:p>
         </p:txBody>
@@ -8596,7 +8596,7 @@
               </a:defRPr>
             </a:pPr>
             <a:r>
-              <a:t>WhatsApp / Helpline: +91 91101 13671  |  वेबसाइट: sagarcoaching.tech  |  Slide 2 of 63</a:t>
+              <a:t>वेबसाइट: sagarcoaching.tech  |  Slide 2 of 63</a:t>
             </a:r>
           </a:p>
         </p:txBody>
@@ -8918,7 +8918,7 @@
               </a:defRPr>
             </a:pPr>
             <a:r>
-              <a:t>WhatsApp / Helpline: +91 91101 13671  |  वेबसाइट: sagarcoaching.tech  |  Slide 20 of 63</a:t>
+              <a:t>वेबसाइट: sagarcoaching.tech  |  Slide 20 of 63</a:t>
             </a:r>
           </a:p>
         </p:txBody>
@@ -9436,7 +9436,7 @@
               </a:defRPr>
             </a:pPr>
             <a:r>
-              <a:t>WhatsApp / Helpline: +91 91101 13671  |  वेबसाइट: sagarcoaching.tech  |  Slide 21 of 63</a:t>
+              <a:t>वेबसाइट: sagarcoaching.tech  |  Slide 21 of 63</a:t>
             </a:r>
           </a:p>
         </p:txBody>
@@ -9883,7 +9883,7 @@
               </a:defRPr>
             </a:pPr>
             <a:r>
-              <a:t>WhatsApp / Helpline: +91 91101 13671  |  वेबसाइट: sagarcoaching.tech  |  Slide 22 of 63</a:t>
+              <a:t>वेबसाइट: sagarcoaching.tech  |  Slide 22 of 63</a:t>
             </a:r>
           </a:p>
         </p:txBody>
@@ -10401,7 +10401,7 @@
               </a:defRPr>
             </a:pPr>
             <a:r>
-              <a:t>WhatsApp / Helpline: +91 91101 13671  |  वेबसाइट: sagarcoaching.tech  |  Slide 23 of 63</a:t>
+              <a:t>वेबसाइट: sagarcoaching.tech  |  Slide 23 of 63</a:t>
             </a:r>
           </a:p>
         </p:txBody>
@@ -10848,7 +10848,7 @@
               </a:defRPr>
             </a:pPr>
             <a:r>
-              <a:t>WhatsApp / Helpline: +91 91101 13671  |  वेबसाइट: sagarcoaching.tech  |  Slide 24 of 63</a:t>
+              <a:t>वेबसाइट: sagarcoaching.tech  |  Slide 24 of 63</a:t>
             </a:r>
           </a:p>
         </p:txBody>
@@ -11366,7 +11366,7 @@
               </a:defRPr>
             </a:pPr>
             <a:r>
-              <a:t>WhatsApp / Helpline: +91 91101 13671  |  वेबसाइट: sagarcoaching.tech  |  Slide 25 of 63</a:t>
+              <a:t>वेबसाइट: sagarcoaching.tech  |  Slide 25 of 63</a:t>
             </a:r>
           </a:p>
         </p:txBody>
@@ -11813,7 +11813,7 @@
               </a:defRPr>
             </a:pPr>
             <a:r>
-              <a:t>WhatsApp / Helpline: +91 91101 13671  |  वेबसाइट: sagarcoaching.tech  |  Slide 26 of 63</a:t>
+              <a:t>वेबसाइट: sagarcoaching.tech  |  Slide 26 of 63</a:t>
             </a:r>
           </a:p>
         </p:txBody>
@@ -12331,7 +12331,7 @@
               </a:defRPr>
             </a:pPr>
             <a:r>
-              <a:t>WhatsApp / Helpline: +91 91101 13671  |  वेबसाइट: sagarcoaching.tech  |  Slide 27 of 63</a:t>
+              <a:t>वेबसाइट: sagarcoaching.tech  |  Slide 27 of 63</a:t>
             </a:r>
           </a:p>
         </p:txBody>
@@ -12778,7 +12778,7 @@
               </a:defRPr>
             </a:pPr>
             <a:r>
-              <a:t>WhatsApp / Helpline: +91 91101 13671  |  वेबसाइट: sagarcoaching.tech  |  Slide 28 of 63</a:t>
+              <a:t>वेबसाइट: sagarcoaching.tech  |  Slide 28 of 63</a:t>
             </a:r>
           </a:p>
         </p:txBody>
@@ -13296,7 +13296,7 @@
               </a:defRPr>
             </a:pPr>
             <a:r>
-              <a:t>WhatsApp / Helpline: +91 91101 13671  |  वेबसाइट: sagarcoaching.tech  |  Slide 29 of 63</a:t>
+              <a:t>वेबसाइट: sagarcoaching.tech  |  Slide 29 of 63</a:t>
             </a:r>
           </a:p>
         </p:txBody>
@@ -13743,7 +13743,7 @@
               </a:defRPr>
             </a:pPr>
             <a:r>
-              <a:t>WhatsApp / Helpline: +91 91101 13671  |  वेबसाइट: sagarcoaching.tech  |  Slide 3 of 63</a:t>
+              <a:t>वेबसाइट: sagarcoaching.tech  |  Slide 3 of 63</a:t>
             </a:r>
           </a:p>
         </p:txBody>
@@ -14190,7 +14190,7 @@
               </a:defRPr>
             </a:pPr>
             <a:r>
-              <a:t>WhatsApp / Helpline: +91 91101 13671  |  वेबसाइट: sagarcoaching.tech  |  Slide 30 of 63</a:t>
+              <a:t>वेबसाइट: sagarcoaching.tech  |  Slide 30 of 63</a:t>
             </a:r>
           </a:p>
         </p:txBody>
@@ -14708,7 +14708,7 @@
               </a:defRPr>
             </a:pPr>
             <a:r>
-              <a:t>WhatsApp / Helpline: +91 91101 13671  |  वेबसाइट: sagarcoaching.tech  |  Slide 31 of 63</a:t>
+              <a:t>वेबसाइट: sagarcoaching.tech  |  Slide 31 of 63</a:t>
             </a:r>
           </a:p>
         </p:txBody>
@@ -15155,7 +15155,7 @@
               </a:defRPr>
             </a:pPr>
             <a:r>
-              <a:t>WhatsApp / Helpline: +91 91101 13671  |  वेबसाइट: sagarcoaching.tech  |  Slide 32 of 63</a:t>
+              <a:t>वेबसाइट: sagarcoaching.tech  |  Slide 32 of 63</a:t>
             </a:r>
           </a:p>
         </p:txBody>
@@ -15673,7 +15673,7 @@
               </a:defRPr>
             </a:pPr>
             <a:r>
-              <a:t>WhatsApp / Helpline: +91 91101 13671  |  वेबसाइट: sagarcoaching.tech  |  Slide 33 of 63</a:t>
+              <a:t>वेबसाइट: sagarcoaching.tech  |  Slide 33 of 63</a:t>
             </a:r>
           </a:p>
         </p:txBody>
@@ -16120,7 +16120,7 @@
               </a:defRPr>
             </a:pPr>
             <a:r>
-              <a:t>WhatsApp / Helpline: +91 91101 13671  |  वेबसाइट: sagarcoaching.tech  |  Slide 34 of 63</a:t>
+              <a:t>वेबसाइट: sagarcoaching.tech  |  Slide 34 of 63</a:t>
             </a:r>
           </a:p>
         </p:txBody>
@@ -16638,7 +16638,7 @@
               </a:defRPr>
             </a:pPr>
             <a:r>
-              <a:t>WhatsApp / Helpline: +91 91101 13671  |  वेबसाइट: sagarcoaching.tech  |  Slide 35 of 63</a:t>
+              <a:t>वेबसाइट: sagarcoaching.tech  |  Slide 35 of 63</a:t>
             </a:r>
           </a:p>
         </p:txBody>
@@ -17085,7 +17085,7 @@
               </a:defRPr>
             </a:pPr>
             <a:r>
-              <a:t>WhatsApp / Helpline: +91 91101 13671  |  वेबसाइट: sagarcoaching.tech  |  Slide 36 of 63</a:t>
+              <a:t>वेबसाइट: sagarcoaching.tech  |  Slide 36 of 63</a:t>
             </a:r>
           </a:p>
         </p:txBody>
@@ -17603,7 +17603,7 @@
               </a:defRPr>
             </a:pPr>
             <a:r>
-              <a:t>WhatsApp / Helpline: +91 91101 13671  |  वेबसाइट: sagarcoaching.tech  |  Slide 37 of 63</a:t>
+              <a:t>वेबसाइट: sagarcoaching.tech  |  Slide 37 of 63</a:t>
             </a:r>
           </a:p>
         </p:txBody>
@@ -18050,7 +18050,7 @@
               </a:defRPr>
             </a:pPr>
             <a:r>
-              <a:t>WhatsApp / Helpline: +91 91101 13671  |  वेबसाइट: sagarcoaching.tech  |  Slide 38 of 63</a:t>
+              <a:t>वेबसाइट: sagarcoaching.tech  |  Slide 38 of 63</a:t>
             </a:r>
           </a:p>
         </p:txBody>
@@ -18568,7 +18568,7 @@
               </a:defRPr>
             </a:pPr>
             <a:r>
-              <a:t>WhatsApp / Helpline: +91 91101 13671  |  वेबसाइट: sagarcoaching.tech  |  Slide 39 of 63</a:t>
+              <a:t>वेबसाइट: sagarcoaching.tech  |  Slide 39 of 63</a:t>
             </a:r>
           </a:p>
         </p:txBody>
@@ -19015,7 +19015,7 @@
               </a:defRPr>
             </a:pPr>
             <a:r>
-              <a:t>WhatsApp / Helpline: +91 91101 13671  |  वेबसाइट: sagarcoaching.tech  |  Slide 4 of 63</a:t>
+              <a:t>वेबसाइट: sagarcoaching.tech  |  Slide 4 of 63</a:t>
             </a:r>
           </a:p>
         </p:txBody>
@@ -19533,7 +19533,7 @@
               </a:defRPr>
             </a:pPr>
             <a:r>
-              <a:t>WhatsApp / Helpline: +91 91101 13671  |  वेबसाइट: sagarcoaching.tech  |  Slide 40 of 63</a:t>
+              <a:t>वेबसाइट: sagarcoaching.tech  |  Slide 40 of 63</a:t>
             </a:r>
           </a:p>
         </p:txBody>
@@ -20051,7 +20051,7 @@
               </a:defRPr>
             </a:pPr>
             <a:r>
-              <a:t>WhatsApp / Helpline: +91 91101 13671  |  वेबसाइट: sagarcoaching.tech  |  Slide 41 of 63</a:t>
+              <a:t>वेबसाइट: sagarcoaching.tech  |  Slide 41 of 63</a:t>
             </a:r>
           </a:p>
         </p:txBody>
@@ -20498,7 +20498,7 @@
               </a:defRPr>
             </a:pPr>
             <a:r>
-              <a:t>WhatsApp / Helpline: +91 91101 13671  |  वेबसाइट: sagarcoaching.tech  |  Slide 42 of 63</a:t>
+              <a:t>वेबसाइट: sagarcoaching.tech  |  Slide 42 of 63</a:t>
             </a:r>
           </a:p>
         </p:txBody>
@@ -21016,7 +21016,7 @@
               </a:defRPr>
             </a:pPr>
             <a:r>
-              <a:t>WhatsApp / Helpline: +91 91101 13671  |  वेबसाइट: sagarcoaching.tech  |  Slide 43 of 63</a:t>
+              <a:t>वेबसाइट: sagarcoaching.tech  |  Slide 43 of 63</a:t>
             </a:r>
           </a:p>
         </p:txBody>
@@ -21463,7 +21463,7 @@
               </a:defRPr>
             </a:pPr>
             <a:r>
-              <a:t>WhatsApp / Helpline: +91 91101 13671  |  वेबसाइट: sagarcoaching.tech  |  Slide 44 of 63</a:t>
+              <a:t>वेबसाइट: sagarcoaching.tech  |  Slide 44 of 63</a:t>
             </a:r>
           </a:p>
         </p:txBody>
@@ -21981,7 +21981,7 @@
               </a:defRPr>
             </a:pPr>
             <a:r>
-              <a:t>WhatsApp / Helpline: +91 91101 13671  |  वेबसाइट: sagarcoaching.tech  |  Slide 45 of 63</a:t>
+              <a:t>वेबसाइट: sagarcoaching.tech  |  Slide 45 of 63</a:t>
             </a:r>
           </a:p>
         </p:txBody>
@@ -22428,7 +22428,7 @@
               </a:defRPr>
             </a:pPr>
             <a:r>
-              <a:t>WhatsApp / Helpline: +91 91101 13671  |  वेबसाइट: sagarcoaching.tech  |  Slide 46 of 63</a:t>
+              <a:t>वेबसाइट: sagarcoaching.tech  |  Slide 46 of 63</a:t>
             </a:r>
           </a:p>
         </p:txBody>
@@ -22946,7 +22946,7 @@
               </a:defRPr>
             </a:pPr>
             <a:r>
-              <a:t>WhatsApp / Helpline: +91 91101 13671  |  वेबसाइट: sagarcoaching.tech  |  Slide 47 of 63</a:t>
+              <a:t>वेबसाइट: sagarcoaching.tech  |  Slide 47 of 63</a:t>
             </a:r>
           </a:p>
         </p:txBody>
@@ -23393,7 +23393,7 @@
               </a:defRPr>
             </a:pPr>
             <a:r>
-              <a:t>WhatsApp / Helpline: +91 91101 13671  |  वेबसाइट: sagarcoaching.tech  |  Slide 48 of 63</a:t>
+              <a:t>वेबसाइट: sagarcoaching.tech  |  Slide 48 of 63</a:t>
             </a:r>
           </a:p>
         </p:txBody>
@@ -23911,7 +23911,7 @@
               </a:defRPr>
             </a:pPr>
             <a:r>
-              <a:t>WhatsApp / Helpline: +91 91101 13671  |  वेबसाइट: sagarcoaching.tech  |  Slide 49 of 63</a:t>
+              <a:t>वेबसाइट: sagarcoaching.tech  |  Slide 49 of 63</a:t>
             </a:r>
           </a:p>
         </p:txBody>
@@ -24358,7 +24358,7 @@
               </a:defRPr>
             </a:pPr>
             <a:r>
-              <a:t>WhatsApp / Helpline: +91 91101 13671  |  वेबसाइट: sagarcoaching.tech  |  Slide 5 of 63</a:t>
+              <a:t>वेबसाइट: sagarcoaching.tech  |  Slide 5 of 63</a:t>
             </a:r>
           </a:p>
         </p:txBody>
@@ -24805,7 +24805,7 @@
               </a:defRPr>
             </a:pPr>
             <a:r>
-              <a:t>WhatsApp / Helpline: +91 91101 13671  |  वेबसाइट: sagarcoaching.tech  |  Slide 50 of 63</a:t>
+              <a:t>वेबसाइट: sagarcoaching.tech  |  Slide 50 of 63</a:t>
             </a:r>
           </a:p>
         </p:txBody>
@@ -25323,7 +25323,7 @@
               </a:defRPr>
             </a:pPr>
             <a:r>
-              <a:t>WhatsApp / Helpline: +91 91101 13671  |  वेबसाइट: sagarcoaching.tech  |  Slide 51 of 63</a:t>
+              <a:t>वेबसाइट: sagarcoaching.tech  |  Slide 51 of 63</a:t>
             </a:r>
           </a:p>
         </p:txBody>
@@ -25770,7 +25770,7 @@
               </a:defRPr>
             </a:pPr>
             <a:r>
-              <a:t>WhatsApp / Helpline: +91 91101 13671  |  वेबसाइट: sagarcoaching.tech  |  Slide 52 of 63</a:t>
+              <a:t>वेबसाइट: sagarcoaching.tech  |  Slide 52 of 63</a:t>
             </a:r>
           </a:p>
         </p:txBody>
@@ -26288,7 +26288,7 @@
               </a:defRPr>
             </a:pPr>
             <a:r>
-              <a:t>WhatsApp / Helpline: +91 91101 13671  |  वेबसाइट: sagarcoaching.tech  |  Slide 53 of 63</a:t>
+              <a:t>वेबसाइट: sagarcoaching.tech  |  Slide 53 of 63</a:t>
             </a:r>
           </a:p>
         </p:txBody>
@@ -26735,7 +26735,7 @@
               </a:defRPr>
             </a:pPr>
             <a:r>
-              <a:t>WhatsApp / Helpline: +91 91101 13671  |  वेबसाइट: sagarcoaching.tech  |  Slide 54 of 63</a:t>
+              <a:t>वेबसाइट: sagarcoaching.tech  |  Slide 54 of 63</a:t>
             </a:r>
           </a:p>
         </p:txBody>
@@ -27253,7 +27253,7 @@
               </a:defRPr>
             </a:pPr>
             <a:r>
-              <a:t>WhatsApp / Helpline: +91 91101 13671  |  वेबसाइट: sagarcoaching.tech  |  Slide 55 of 63</a:t>
+              <a:t>वेबसाइट: sagarcoaching.tech  |  Slide 55 of 63</a:t>
             </a:r>
           </a:p>
         </p:txBody>
@@ -27700,7 +27700,7 @@
               </a:defRPr>
             </a:pPr>
             <a:r>
-              <a:t>WhatsApp / Helpline: +91 91101 13671  |  वेबसाइट: sagarcoaching.tech  |  Slide 56 of 63</a:t>
+              <a:t>वेबसाइट: sagarcoaching.tech  |  Slide 56 of 63</a:t>
             </a:r>
           </a:p>
         </p:txBody>
@@ -28218,7 +28218,7 @@
               </a:defRPr>
             </a:pPr>
             <a:r>
-              <a:t>WhatsApp / Helpline: +91 91101 13671  |  वेबसाइट: sagarcoaching.tech  |  Slide 57 of 63</a:t>
+              <a:t>वेबसाइट: sagarcoaching.tech  |  Slide 57 of 63</a:t>
             </a:r>
           </a:p>
         </p:txBody>
@@ -28665,7 +28665,7 @@
               </a:defRPr>
             </a:pPr>
             <a:r>
-              <a:t>WhatsApp / Helpline: +91 91101 13671  |  वेबसाइट: sagarcoaching.tech  |  Slide 58 of 63</a:t>
+              <a:t>वेबसाइट: sagarcoaching.tech  |  Slide 58 of 63</a:t>
             </a:r>
           </a:p>
         </p:txBody>
@@ -29183,7 +29183,7 @@
               </a:defRPr>
             </a:pPr>
             <a:r>
-              <a:t>WhatsApp / Helpline: +91 91101 13671  |  वेबसाइट: sagarcoaching.tech  |  Slide 59 of 63</a:t>
+              <a:t>वेबसाइट: sagarcoaching.tech  |  Slide 59 of 63</a:t>
             </a:r>
           </a:p>
         </p:txBody>
@@ -29630,7 +29630,7 @@
               </a:defRPr>
             </a:pPr>
             <a:r>
-              <a:t>WhatsApp / Helpline: +91 91101 13671  |  वेबसाइट: sagarcoaching.tech  |  Slide 6 of 63</a:t>
+              <a:t>वेबसाइट: sagarcoaching.tech  |  Slide 6 of 63</a:t>
             </a:r>
           </a:p>
         </p:txBody>
@@ -30148,7 +30148,7 @@
               </a:defRPr>
             </a:pPr>
             <a:r>
-              <a:t>WhatsApp / Helpline: +91 91101 13671  |  वेबसाइट: sagarcoaching.tech  |  Slide 60 of 63</a:t>
+              <a:t>वेबसाइट: sagarcoaching.tech  |  Slide 60 of 63</a:t>
             </a:r>
           </a:p>
         </p:txBody>
@@ -30666,7 +30666,7 @@
               </a:defRPr>
             </a:pPr>
             <a:r>
-              <a:t>WhatsApp / Helpline: +91 91101 13671  |  वेबसाइट: sagarcoaching.tech  |  Slide 61 of 63</a:t>
+              <a:t>वेबसाइट: sagarcoaching.tech  |  Slide 61 of 63</a:t>
             </a:r>
           </a:p>
         </p:txBody>
@@ -31113,7 +31113,7 @@
               </a:defRPr>
             </a:pPr>
             <a:r>
-              <a:t>WhatsApp / Helpline: +91 91101 13671  |  वेबसाइट: sagarcoaching.tech  |  Slide 62 of 63</a:t>
+              <a:t>वेबसाइट: sagarcoaching.tech  |  Slide 62 of 63</a:t>
             </a:r>
           </a:p>
         </p:txBody>
@@ -31631,7 +31631,7 @@
               </a:defRPr>
             </a:pPr>
             <a:r>
-              <a:t>WhatsApp / Helpline: +91 91101 13671  |  वेबसाइट: sagarcoaching.tech  |  Slide 63 of 63</a:t>
+              <a:t>वेबसाइट: sagarcoaching.tech  |  Slide 63 of 63</a:t>
             </a:r>
           </a:p>
         </p:txBody>
@@ -31953,7 +31953,7 @@
               </a:defRPr>
             </a:pPr>
             <a:r>
-              <a:t>WhatsApp / Helpline: +91 91101 13671  |  वेबसाइट: sagarcoaching.tech  |  Slide 7 of 63</a:t>
+              <a:t>वेबसाइट: sagarcoaching.tech  |  Slide 7 of 63</a:t>
             </a:r>
           </a:p>
         </p:txBody>
@@ -32400,7 +32400,7 @@
               </a:defRPr>
             </a:pPr>
             <a:r>
-              <a:t>WhatsApp / Helpline: +91 91101 13671  |  वेबसाइट: sagarcoaching.tech  |  Slide 8 of 63</a:t>
+              <a:t>वेबसाइट: sagarcoaching.tech  |  Slide 8 of 63</a:t>
             </a:r>
           </a:p>
         </p:txBody>
@@ -32918,7 +32918,7 @@
               </a:defRPr>
             </a:pPr>
             <a:r>
-              <a:t>WhatsApp / Helpline: +91 91101 13671  |  वेबसाइट: sagarcoaching.tech  |  Slide 9 of 63</a:t>
+              <a:t>वेबसाइट: sagarcoaching.tech  |  Slide 9 of 63</a:t>
             </a:r>
           </a:p>
         </p:txBody>
